--- a/AOS/slides/Lecture-14.pptx
+++ b/AOS/slides/Lecture-14.pptx
@@ -330,7 +330,7 @@
   <inkml:trace contextRef="#ctx0" brushRef="#br0" timeOffset="-48711.89">25224 15452 0,'-18'-18'0,"36"36"0,-54-54 15,19 36-15,17-17 16,-18-1 0,18-17-1,35 35 1,18 0-1,18 53 1,-18 106 0,-71 52-1,-17-52 1,-71 17 0,35-52-1</inkml:trace>
   <inkml:trace contextRef="#ctx0" brushRef="#br0" timeOffset="-48430.12">25806 16087 0,'17'-18'16,"-34"36"-16,52-36 0,-35 0 16,18 18-16,-1 0 15,-17 53 1,-17 18 15,-54 35-15,1-71-1,34-17-15</inkml:trace>
   <inkml:trace contextRef="#ctx0" brushRef="#br0" timeOffset="-48229.88">26247 15593 0,'-18'-18'0,"36"36"0,-54-53 0,36 17 16,-17 0-1,17 1-15,53 17 32,-18 17-32</inkml:trace>
-  <inkml:trace contextRef="#ctx0" brushRef="#br0" timeOffset="-37912.81">28116 11553 0,'0'0'16,"0"-17"-16,-17 17 0,-19-18 16,-52 1-1,18 17 1,70-18 0,17 18 15,54-18-16,88-17 1,105 17 0,-52 1-1,-106 17 1,88-18-16,0 18 31,-141 0-15,-71 0-1,-17 18 1,-36-1-16</inkml:trace>
+  <inkml:trace contextRef="#ctx0" brushRef="#br0" timeOffset="-37912.82">28116 11553 0,'0'0'16,"0"-17"-16,-17 17 0,-19-18 16,-52 1-1,18 17 1,70-18 0,17 18 15,54-18-16,88-17 1,105 17 0,-52 1-1,-106 17 1,88-18-16,0 18 31,-141 0-15,-71 0-1,-17 18 1,-36-1-16</inkml:trace>
   <inkml:trace contextRef="#ctx0" brushRef="#br0" timeOffset="-35977.46">6809 12330 0,'-36'-18'31,"36"0"63,-17 18-79,17-17 1,17 17-1,1 0 1,0 0 0,35 0-1,-18 17-15,71-17 16,105 18 0,19 17-1,-19-17 1,-105-1-1,-18 1 1,-70-18 0,-71 18 15,0-18-15,35 0-16</inkml:trace>
   <inkml:trace contextRef="#ctx0" brushRef="#br0" timeOffset="49534">3034 12136 0,'-18'0'16,"1"0"15,-1 0 16,0 0-31,18 17-16,-17-17 15,-1 0-15,36 0 47,-1 0-31,1 0-1,17 0 1,-17 0-16,35 0 16,53 0-1,-1 18 1,37-18-1,-72 0 1,-52 0-16,35 17 16,-18-17-1,-35 18 1,-18 0 0,1-18-1</inkml:trace>
   <inkml:trace contextRef="#ctx0" brushRef="#br0" timeOffset="50969.14">3281 12012 0,'0'0'0,"-18"-18"16,1 18-16,-1-17 15,0 17 16,36 0 1,0 0 61,-36 0 32,0 0-93,18 17-17,18-17 110,0 0-93,-1 0-17,1 0-15,-18 18 16,35-18-1,36 35 1,-18-17 0,-36-18-1,1 18-15,-1-18 16,1 17 0,0-17-1,-1 0 110,1 0-94,-18 18-15,0-36 62,-18 18-78,1 0 31,17 18 1,-18-18-17,18 18-15,0-1 16,-18 18 0,18-17-1,-17 0 95,17-1-110,-18 1 0,1 0 15,-1-1-15,-53 54 16,-87 35-1,-1-18 1,106-53 0</inkml:trace>
@@ -500,7 +500,7 @@
   <inkml:trace contextRef="#ctx0" brushRef="#br0" timeOffset="29854.98">21202 12594 0,'0'0'0,"35"-17"0,36-36 16,-36 0-1,-35 17 1,-53 1 0,-17 53 15,-1 52-16,18 1 1,35-36-16,1 36 16,-1-1-1,71-34 1,18-54 0,34-53-1,-52 1 1,-35 35-16,17-18 15,-17 17 1,-18 72 0,0 17 15,18 17-15,-1-52-1,54-18 1,17-18-1,-17-35 1,-36 36-16,35-72 16,36 1-1,-35 35 1,-36 71 0,-17 17-1,-18 0-15,0 18 16,-18 36-1,-17-54 1,-18-35 0,18 0-16,-18 0 15,-53-53 17,71-35-17,52-1 1,36 37-1,0 34 1,35 53 0,0 71-1,-35 18 1,-53-19 0,-88 54-1,18-88 1,-19-36-1,54-35 1,0-35 0,70-71-1,53 0 1,71 18 15,-53 35-15,88-18-1,-53 1 1,-88-18 0,-71 35-1,1 35-15,-36 0 16,-53 36 0,18 53-1,35 17 1,53 0-1,17 18 1,36-18 15,0-35-15,-35-53-16</inkml:trace>
   <inkml:trace contextRef="#ctx0" brushRef="#br0" timeOffset="35605.31">1817 12876 0,'17'-17'16,"-34"34"-16,52-70 0,-17 53 0,-1-35 15,1 18 1,0 17 0,35 35-1,-18 18 1,-18-18-16,19 36 16,17 34-1,0-34 1,-36-18-1,1-35 1,-18-36 15,0-70-15,0-18 0,0 0-1,0 71 1,35 35-1,18 53 1,18 35 0,-18-18-1,17 1 1,1-71 0,-36-35-1,-17-71 1,-54 35-1,-52-52 17,0 52-17,53 89 1,17 17-16</inkml:trace>
   <inkml:trace contextRef="#ctx0" brushRef="#br0" timeOffset="35977.53">2593 12735 0,'0'-17'0,"0"34"16,-18-52-16,1 17 0,17 1 15,17-1 1,71 53-1,1 1 1,-54-19 0,53 71-1,-70-35 1,-18 18 0,-18-18-1,-35-71 1,18 1-1,17-19-15,-17-34 16,17 34-16,18-34 16,53-36-1,71 36 1</inkml:trace>
-  <inkml:trace contextRef="#ctx0" brushRef="#br0" timeOffset="37243.22">3351 12647 0,'0'0'0,"0"-18"15,0 1-15,-35-18 32,17 17-17,18 0-15,-35 18 16,-18 36-1,0 34 1,18 18 0,35 0-1,35-35 1,36-35 0,-18-18-1,-36-71 1,-17 1-1,-17-18 1,-1 35 0,36 88 31,-1 0-47,19 1 15,34-1 1,1-53-1,-1-52 1,-34-1 0,-19 36-16,1-36 15,-18 1 1,0 70 0,18 88-1,-1 0 1,36 36 15,18-36-15,-18-35-1,-36-36 1,-17-34 0,-53-71-1,-17-71 1,-1-35-1,36 53 1,17 0 0,36 70-1,17 53 1,18 54 0,-35-19-16,35 54 15,0 70 1,-53 0-1,-36-35 17,1-53-17,17-36-15,1-17 16,17-70 0,53-54-1,17-17 1,-17 71-1,0 34 1,-18 72 0,18 70-1,-17-18 1,17 53 0,-1-35-1,-16-53 16,-36-36-15,-18-34 0,-35-72-1,-17-52 1,-1-53 0,18 18-1,53 88 1,0 52-16,0 1 15,35 70 1,1 89 0,-1-36-1,-17 53 1,-36-35 0</inkml:trace>
+  <inkml:trace contextRef="#ctx0" brushRef="#br0" timeOffset="37243.21">3351 12647 0,'0'0'0,"0"-18"15,0 1-15,-35-18 32,17 17-17,18 0-15,-35 18 16,-18 36-1,0 34 1,18 18 0,35 0-1,35-35 1,36-35 0,-18-18-1,-36-71 1,-17 1-1,-17-18 1,-1 35 0,36 88 31,-1 0-47,19 1 15,34-1 1,1-53-1,-1-52 1,-34-1 0,-19 36-16,1-36 15,-18 1 1,0 70 0,18 88-1,-1 0 1,36 36 15,18-36-15,-18-35-1,-36-36 1,-17-34 0,-53-71-1,-17-71 1,-1-35-1,36 53 1,17 0 0,36 70-1,17 53 1,18 54 0,-35-19-16,35 54 15,0 70 1,-53 0-1,-36-35 17,1-53-17,17-36-15,1-17 16,17-70 0,53-54-1,17-17 1,-17 71-1,0 34 1,-18 72 0,18 70-1,-17-18 1,17 53 0,-1-35-1,-16-53 16,-36-36-15,-18-34 0,-35-72-1,-17-52 1,-1-53 0,18 18-1,53 88 1,0 52-16,0 1 15,35 70 1,1 89 0,-1-36-1,-17 53 1,-36-35 0</inkml:trace>
   <inkml:trace contextRef="#ctx0" brushRef="#br0" timeOffset="37959.93">4269 12100 0,'0'0'0,"0"-17"15,-18 34 16,18 1-31,-18 0 16,18 34 0,0-34-16,0 0 15,36 17 1,34-53 0,-35-17-1,1-35 16,-36-1-15,-53 36 0,0 52-1,35 1-15,-17 70 16,17 53 0,54 0-1,52-70 1,0-53-1,-35-18-15,35-18 16,-17-53 0,-54-34-1,-70-54 1,-17 71 0,35 35-16,-18 0 15,0 35 16,88 1-15,0 17 0,1 0-16,34 17 15,36 54 1,-71 70 0,-35 18-1,0-71 1,0-35-16,0 0 15,18-18 1,17-35 0,-17-18-16</inkml:trace>
   <inkml:trace contextRef="#ctx0" brushRef="#br0" timeOffset="38143.24">5098 12471 0,'0'0'0,"0"-18"31,0 0-31,17 18 16,19-35 0,52-18-1,-53 36-15</inkml:trace>
   <inkml:trace contextRef="#ctx0" brushRef="#br0" timeOffset="39077.54">5680 12171 0,'-18'-35'16,"36"70"-16,-54-88 0,36 18 15,-52-54 1,16 19 0,1 52-1,-18 18 1,18 53 0,17-35-16,-17 52 15,0 36 1,52 0-1,19-53 1,16-18 0,19-52-1,-18-36 1,-35-53 0,-18 35-1,-18 1 16,0 70-15,18 35 0,18 36-1,17 17 1,36-53 0,17-35-1,-18-53 1,-52-17-1,-36-72 1,-52-34 0,-1 35-1,36 106 1,17 17 0,18 89-1,53 34 16,36 19-15,-1-36 0,18 0-1,-36-17 1,-17-71 0,-35-35-1,-18 17-15,0-53 16,0-70-1,-53-17 1,17 52 0,1 70-1,18 36 1,-1 71 0,36 52-1,17-34 16,-18-54-31,36 71 16,36 17 0,-54-88-16</inkml:trace>
@@ -848,7 +848,7 @@
   <inkml:trace contextRef="#ctx0" brushRef="#br0">1588 9349 0,'-18'0'250,"36"0"-63,-1 0-187,1 0 16,-1 0-16,1 0 16,0 0-16,-1 0 0,36 0 15,-35 0-15,35 0 16,0 0 0,-18 0 15,0 0-16,-17 0 1,0 0-16,-1 17 16,18-17-1,-17 0 17,-36 0-17,1 0 1</inkml:trace>
   <inkml:trace contextRef="#ctx0" brushRef="#br0" timeOffset="3788.15">18221 9490 0,'-18'0'16,"1"-18"-16,-1 18 15,0 0-15,1 0 16,-1 0 15,1 0 47,-1 0-31,36 0 47,-1 0-78,1 0-1,-1 0 1,1 0-16,35 0 15,0 18 1,-18-18 0,-17 0-16,17 0 15,18 17 1,-18-17 0,1 0-1,-54 0 48</inkml:trace>
   <inkml:trace contextRef="#ctx0" brushRef="#br0" timeOffset="68501.67">25700 11994 0,'0'0'15,"0"18"-15,18 53 16,-1-54 0,1 36-16,-18 0 31,17-35-16,-17-1-15,18 1 16,0-18-16,-1 0 16,72 0-1,34-53 1,36-53 0,-71 53-1,-53 18-15,18 0 16,-35 0-1</inkml:trace>
-  <inkml:trace contextRef="#ctx0" brushRef="#br0" timeOffset="74990.4">15416 14111 0,'-17'0'0,"17"-18"0,-18 18 15,18-17-15,-18 17 16,-17-35 0,35 52 15,-17 1-16,17-1 1,0 19 0,0-19-1,17 1-15,1-18 16,35 0 0,0-35 15,-36 35-31</inkml:trace>
+  <inkml:trace contextRef="#ctx0" brushRef="#br0" timeOffset="74990.39">15416 14111 0,'-17'0'0,"17"-18"0,-18 18 15,18-17-15,-18 17 16,-17-35 0,35 52 15,-17 1-16,17-1 1,0 19 0,0-19-1,17 1-15,1-18 16,35 0 0,0-35 15,-36 35-31</inkml:trace>
   <inkml:trace contextRef="#ctx0" brushRef="#br0" timeOffset="92417.18">16704 6950 0,'-18'-18'15,"36"18"63,0-18-62,-1 18-16,36-17 16,53-18-1,-35-1 1,-36 36-16,71-35 16,-71 35-1,0-18 16,-52 18-15,-19 18 15</inkml:trace>
   <inkml:trace contextRef="#ctx0" brushRef="#br0" timeOffset="92863.98">16722 6720 0,'-18'-17'0,"18"34"47,18-17-31,-18 18-1,17-18-15,1 18 16,53 17-1,17 18 1,-18-18 0,-34-17-16,52 17 15,-18 0 17,-52-35-32</inkml:trace>
   <inkml:trace contextRef="#ctx0" brushRef="#br0" timeOffset="93699.98">16245 7444 0,'0'-18'0,"0"-17"31,-17 35-31,17-18 15,-18 18-15,-35 0 16,0-18 0,0 54-1,0-1 1,-17 36 0,35 17 15,17 0-16,53-18 1,18-52 0,-35 0-16,70-1 15,-53-17-15,36 0 16,-18 0-16</inkml:trace>
@@ -955,7 +955,7 @@
   <inkml:trace contextRef="#ctx0" brushRef="#br0" timeOffset="153720.41">25418 14870 0,'17'-36'16,"-34"72"-16,34-107 0,-17 36 16,-17-18-16,-1 18 15,0 17-15,-35 18 16,36 0 0,-54 35-1,-35 53 1,18 1-1,71-1 1,34-35 0,71 0-1,54 0 1,-1-18 0,-88 0-1,-71 0 1,-70 18-1,-71 18 1,35-54 0,89-17-1,53-52 1</inkml:trace>
   <inkml:trace contextRef="#ctx0" brushRef="#br0" timeOffset="154120.47">25629 14905 0,'0'0'16,"36"-35"0,-36 17-1,0 0 1,0 54 0,17-36-16,36 35 15,35 18 1,36 0-1,-18-53 1,-36-18 0,-17-70-1,-53-18 17,-18 0-17,1 71 1,-1 88-1,1 88 1,34 18 0,1-18-1,-18-71 1,0 1 0,-35-36-1</inkml:trace>
   <inkml:trace contextRef="#ctx0" brushRef="#br0" timeOffset="154637.29">26705 14781 0,'18'-35'0,"-36"70"16,54-88-16,-36 18 0,0 18 16,0-19-16,-36 1 15,-34 0 1,17 17 0,0 0-1,35 36 1,-17 17-1,-18 36 1,18 17 0,35-17 15,35-18-15,36-18-1,34-18 1,1-17-1,-70 18 1,-19 17 0,-70 1-1,-35-1 1,-18 0 0,36-35-1,52 0-15</inkml:trace>
-  <inkml:trace contextRef="#ctx0" brushRef="#br0" timeOffset="155922.88">27287 14640 0,'36'-17'15,"-72"34"-15,107-52 0,-53 17 16,-1 1-16,-17-1 0,0-17 15,-35 17 1,17 18 0,-52-17-16,-36 52 31,0 18-15,53 0-1,-17 52 1,52 1-1,53-18 1,71-35 0,88-35-1,-53-53 1,71-53 0,-53-36-1,-106 18 1,-53 71-1,-53 17 1,-36 36 15,1 35-15,53 0 0,17-36-16,1 36 15,17 0 1,17-17-1,36-36 1,-18-18 0,-17 0-16,17-35 15,1-35 1,-36 18 0,0 52-1,0 71 1,-18 17-1,36 19 17,35-36-17,0-53 1,35-36 0,0-70-1,-18-70 1,-70-36-1,-17 89 1,-36 52 0,-35 124-1,17 106 1,54-35 0,34 52-1,36-53 1,35-87-1,0-72 1,1-87 15,-19-1-15,18-105 0,-70 0-1,-18 141 1,-70 52-1,-19 89 1,1 88 0,53-17-1,35-71-15,0 53 16,53 52 0,17-52-1,19-35 1,-37-54 15,-34-17-31</inkml:trace>
+  <inkml:trace contextRef="#ctx0" brushRef="#br0" timeOffset="155922.87">27287 14640 0,'36'-17'15,"-72"34"-15,107-52 0,-53 17 16,-1 1-16,-17-1 0,0-17 15,-35 17 1,17 18 0,-52-17-16,-36 52 31,0 18-15,53 0-1,-17 52 1,52 1-1,53-18 1,71-35 0,88-35-1,-53-53 1,71-53 0,-53-36-1,-106 18 1,-53 71-1,-53 17 1,-36 36 15,1 35-15,53 0 0,17-36-16,1 36 15,17 0 1,17-17-1,36-36 1,-18-18 0,-17 0-16,17-35 15,1-35 1,-36 18 0,0 52-1,0 71 1,-18 17-1,36 19 17,35-36-17,0-53 1,35-36 0,0-70-1,-18-70 1,-70-36-1,-17 89 1,-36 52 0,-35 124-1,17 106 1,54-35 0,34 52-1,36-53 1,35-87-1,0-72 1,1-87 15,-19-1-15,18-105 0,-70 0-1,-18 141 1,-70 52-1,-19 89 1,1 88 0,53-17-1,35-71-15,0 53 16,53 52 0,17-52-1,19-35 1,-37-54 15,-34-17-31</inkml:trace>
   <inkml:trace contextRef="#ctx0" brushRef="#br0" timeOffset="156373.41">28769 14323 0,'0'0'0,"-18"17"16,1-17-16,-1 0 15,18-17 17,53-36-17,-18 0 1,1 18-16,34-54 15,107-69 1,52-54 0,-35 36-1,-124 70 1,-70 71 0,-70 35-1</inkml:trace>
   <inkml:trace contextRef="#ctx0" brushRef="#br0" timeOffset="156673.28">29210 13458 0,'0'0'0,"-18"0"0,1 0 0,-19-17 32,19-18-17,34 17 1,36-35-1,36 18 1,-1 35 0,-18 35-1,1 71 1,-53 17 0,-1 18-1,-17-17 1,0-54-1,-17-52-15,17 17 16</inkml:trace>
   <inkml:trace contextRef="#ctx0" brushRef="#br0" timeOffset="157241.56">29757 12047 0,'0'-17'16,"0"34"-16,17-52 0,-17 17 0,0 1 31,0-1-31</inkml:trace>
@@ -1026,7 +1026,7 @@
   <inkml:trace contextRef="#ctx0" brushRef="#br0" timeOffset="6823.87">12735 7673 0,'18'-18'0,"-36"36"0,36-53 16,-18 17-16,-18 0 0,1-17 15,-1 0 1,0 17-16,-35 1 31,1 69-15,16 19 0,19-36-16,17 18 15,35 35 1,35-17-1,19-36 1,-19-35 0,-52-17-16,17-36 15,-53-71 1,-70 1 0,0 52-1,53 71 1</inkml:trace>
   <inkml:trace contextRef="#ctx0" brushRef="#br0" timeOffset="7224.24">13070 7673 0,'36'-18'0,"-72"36"0,107-53 15,-53 17-15,-1 0 0,-17 1 16,18-19-1,-71 54 17,-35 17-17,-36 1 1,89-19 0,17-17-16,18-17 15,71-19 1,88-17-1,-18 53 1,-88 18 15,-53 53-15,-106 34 0,18-16-1,70-19 1,53-52-1,71 0 1</inkml:trace>
   <inkml:trace contextRef="#ctx0" brushRef="#br0" timeOffset="7794.23">10813 8802 0,'-18'0'15,"36"0"-15,-54 0 31,36 17 1,18-17-32,-18 18 15,18-18-15,-1 18 16,19-1 0,-1 1-1,-35 0 1,17-1 15,54 1-15,52 0 15,-34-18-31,158 17 16,229 18-1,106 18 1,35 18-1,-52-18 1,-283-18 0,-17-17-1,-160-18 1,-52 0 0</inkml:trace>
-  <inkml:trace contextRef="#ctx0" brushRef="#br0" timeOffset="8342.85">12083 8678 0,'0'0'0,"0"-35"0,0 17 16,17 1-16,-17-1 0,0-17 16,0 17-16,0 1 15,-17-1 1,-54 18-1,18 18 17,18-1-32,-53 18 15,-18 18 1,35 0 0,71 0-1,53 0 1,-17-35-16,69 17 15,54 36 1,-35-36 0,-89 0-1,-35-17-15,-18-1 16,-105 19 0,-36-1-1,0-35 1,89-35-1</inkml:trace>
+  <inkml:trace contextRef="#ctx0" brushRef="#br0" timeOffset="8342.84">12083 8678 0,'0'0'0,"0"-35"0,0 17 16,17 1-16,-17-1 0,0-17 16,0 17-16,0 1 15,-17-1 1,-54 18-1,18 18 17,18-1-32,-53 18 15,-18 18 1,35 0 0,71 0-1,53 0 1,-17-35-16,69 17 15,54 36 1,-35-36 0,-89 0-1,-35-17-15,-18-1 16,-105 19 0,-36-1-1,0-35 1,89-35-1</inkml:trace>
   <inkml:trace contextRef="#ctx0" brushRef="#br0" timeOffset="8743.73">12577 8784 0,'0'-17'0,"0"34"0,0-52 0,0 17 16,-18-17-16,0 0 15,-17-18 1,-18 35 0,0 53-1,18 18 1,35-17-1,0 34 1,35 36 0,71-18-1,-35-70 1,-36-18-16,35-18 16,-17-70-1,-70-71 1,-89 18-1,35 71 1,1 70-16</inkml:trace>
   <inkml:trace contextRef="#ctx0" brushRef="#br0" timeOffset="9193.79">13000 8661 0,'-18'-18'16,"36"36"-16,-36-54 0,1 19 15,-19-54 1,1 18 0,35 0-1,35 18 1,-17 35-16,53-18 15,52 18 1,-35 53 0,-53 36-1,-70-19 1,-18 18 0,-17-35-1,34-17 1,36-19 15,36 1-15,70 17-1,-1 18 1,-52-35 0,-70 17-1,-107 18 1</inkml:trace>
   <inkml:trace contextRef="#ctx0" brushRef="#br0" timeOffset="10862.4">9419 9137 0,'-17'0'15,"34"0"-15,-52 0 0,17 0 16,1 0-16,-19 0 16,1-18-1,0 18 1,17 0 0,36 0 30,-1 0-30,36 0 0,0 0-16,53 0 15,88 0 1,18 0 0,-1 0-1,-34 0 16,70 0-15,17 18 0,1 0-1,-71-18 1,-71 0-16,107 17 16,105-17-1,-18 18 1,-34 0-1,-107-1 1,71 1 0,18-18-1,-1 0 1,-105 0 0,-71 0-16,53 17 31,106-17-16,0 18 1,18-18 0,-124 18-1,70-18 1,-17 17 0,71-17-1,-71 0 1,-88 0-16,70 18 15,54 0 1,-89-1 0,-35 1-1,-71-18 1,53 0 0,0-18 15,-17 18-16,-89 0 1</inkml:trace>
@@ -1148,7 +1148,7 @@
           <a:p>
             <a:fld id="{D9C7EA9E-D675-4708-ADC8-3F6A671829A2}" type="datetimeFigureOut">
               <a:rPr lang="en-US" smtClean="0"/>
-              <a:t>3/16/2021</a:t>
+              <a:t>2/20/2026</a:t>
             </a:fld>
             <a:endParaRPr lang="en-US"/>
           </a:p>
@@ -1562,7 +1562,7 @@
           <a:p>
             <a:fld id="{1E3BFF52-3707-4B05-ABFF-AA66FBE57B0C}" type="datetimeFigureOut">
               <a:rPr lang="en-US" smtClean="0"/>
-              <a:t>3/16/2021</a:t>
+              <a:t>2/20/2026</a:t>
             </a:fld>
             <a:endParaRPr lang="en-US"/>
           </a:p>
@@ -1760,7 +1760,7 @@
           <a:p>
             <a:fld id="{1E3BFF52-3707-4B05-ABFF-AA66FBE57B0C}" type="datetimeFigureOut">
               <a:rPr lang="en-US" smtClean="0"/>
-              <a:t>3/16/2021</a:t>
+              <a:t>2/20/2026</a:t>
             </a:fld>
             <a:endParaRPr lang="en-US"/>
           </a:p>
@@ -1968,7 +1968,7 @@
           <a:p>
             <a:fld id="{1E3BFF52-3707-4B05-ABFF-AA66FBE57B0C}" type="datetimeFigureOut">
               <a:rPr lang="en-US" smtClean="0"/>
-              <a:t>3/16/2021</a:t>
+              <a:t>2/20/2026</a:t>
             </a:fld>
             <a:endParaRPr lang="en-US"/>
           </a:p>
@@ -2166,7 +2166,7 @@
           <a:p>
             <a:fld id="{1E3BFF52-3707-4B05-ABFF-AA66FBE57B0C}" type="datetimeFigureOut">
               <a:rPr lang="en-US" smtClean="0"/>
-              <a:t>3/16/2021</a:t>
+              <a:t>2/20/2026</a:t>
             </a:fld>
             <a:endParaRPr lang="en-US"/>
           </a:p>
@@ -2441,7 +2441,7 @@
           <a:p>
             <a:fld id="{1E3BFF52-3707-4B05-ABFF-AA66FBE57B0C}" type="datetimeFigureOut">
               <a:rPr lang="en-US" smtClean="0"/>
-              <a:t>3/16/2021</a:t>
+              <a:t>2/20/2026</a:t>
             </a:fld>
             <a:endParaRPr lang="en-US"/>
           </a:p>
@@ -2706,7 +2706,7 @@
           <a:p>
             <a:fld id="{1E3BFF52-3707-4B05-ABFF-AA66FBE57B0C}" type="datetimeFigureOut">
               <a:rPr lang="en-US" smtClean="0"/>
-              <a:t>3/16/2021</a:t>
+              <a:t>2/20/2026</a:t>
             </a:fld>
             <a:endParaRPr lang="en-US"/>
           </a:p>
@@ -3118,7 +3118,7 @@
           <a:p>
             <a:fld id="{1E3BFF52-3707-4B05-ABFF-AA66FBE57B0C}" type="datetimeFigureOut">
               <a:rPr lang="en-US" smtClean="0"/>
-              <a:t>3/16/2021</a:t>
+              <a:t>2/20/2026</a:t>
             </a:fld>
             <a:endParaRPr lang="en-US"/>
           </a:p>
@@ -3259,7 +3259,7 @@
           <a:p>
             <a:fld id="{1E3BFF52-3707-4B05-ABFF-AA66FBE57B0C}" type="datetimeFigureOut">
               <a:rPr lang="en-US" smtClean="0"/>
-              <a:t>3/16/2021</a:t>
+              <a:t>2/20/2026</a:t>
             </a:fld>
             <a:endParaRPr lang="en-US"/>
           </a:p>
@@ -3372,7 +3372,7 @@
           <a:p>
             <a:fld id="{1E3BFF52-3707-4B05-ABFF-AA66FBE57B0C}" type="datetimeFigureOut">
               <a:rPr lang="en-US" smtClean="0"/>
-              <a:t>3/16/2021</a:t>
+              <a:t>2/20/2026</a:t>
             </a:fld>
             <a:endParaRPr lang="en-US"/>
           </a:p>
@@ -3683,7 +3683,7 @@
           <a:p>
             <a:fld id="{1E3BFF52-3707-4B05-ABFF-AA66FBE57B0C}" type="datetimeFigureOut">
               <a:rPr lang="en-US" smtClean="0"/>
-              <a:t>3/16/2021</a:t>
+              <a:t>2/20/2026</a:t>
             </a:fld>
             <a:endParaRPr lang="en-US"/>
           </a:p>
@@ -3971,7 +3971,7 @@
           <a:p>
             <a:fld id="{1E3BFF52-3707-4B05-ABFF-AA66FBE57B0C}" type="datetimeFigureOut">
               <a:rPr lang="en-US" smtClean="0"/>
-              <a:t>3/16/2021</a:t>
+              <a:t>2/20/2026</a:t>
             </a:fld>
             <a:endParaRPr lang="en-US"/>
           </a:p>
@@ -4212,7 +4212,7 @@
           <a:p>
             <a:fld id="{1E3BFF52-3707-4B05-ABFF-AA66FBE57B0C}" type="datetimeFigureOut">
               <a:rPr lang="en-US" smtClean="0"/>
-              <a:t>3/16/2021</a:t>
+              <a:t>2/20/2026</a:t>
             </a:fld>
             <a:endParaRPr lang="en-US"/>
           </a:p>
